--- a/说课PPT/AI应用基础（48课时版）-课程整体说课（15分钟）.pptx
+++ b/说课PPT/AI应用基础（48课时版）-课程整体说课（15分钟）.pptx
@@ -32,6 +32,8 @@
     <p:sldId id="280" r:id="rId32"/>
     <p:sldId id="281" r:id="rId33"/>
     <p:sldId id="282" r:id="rId34"/>
+    <p:sldId id="283" r:id="rId35"/>
+    <p:sldId id="284" r:id="rId36"/>
   </p:sldIdLst>
   <p:sldSz cx="12192000" cy="6858000" type="screen4x3"/>
   <p:notesSz cx="6858000" cy="9144000"/>
@@ -26961,6 +26963,223 @@
                 <a:latin typeface="微软雅黑"/>
               </a:rPr>
               <a:t>以生为本   |   做中学 · 学中做</a:t>
+            </a:r>
+          </a:p>
+        </p:txBody>
+      </p:sp>
+    </p:spTree>
+  </p:cSld>
+  <p:clrMapOvr>
+    <a:masterClrMapping/>
+  </p:clrMapOvr>
+</p:sld>
+</file>
+
+<file path=ppt/slides/slide28.xml><?xml version="1.0" encoding="utf-8"?>
+<p:sld xmlns:a="http://schemas.openxmlformats.org/drawingml/2006/main" xmlns:p="http://schemas.openxmlformats.org/presentationml/2006/main" xmlns:r="http://schemas.openxmlformats.org/officeDocument/2006/relationships">
+  <p:cSld>
+    <p:spTree>
+      <p:nvGrpSpPr>
+        <p:cNvPr id="1" name=""/>
+        <p:cNvGrpSpPr/>
+        <p:nvPr/>
+      </p:nvGrpSpPr>
+      <p:grpSpPr/>
+      <p:sp>
+        <p:nvSpPr>
+          <p:cNvPr id="2" name="TextBox 1"/>
+          <p:cNvSpPr txBox="1"/>
+          <p:nvPr/>
+        </p:nvSpPr>
+        <p:spPr>
+          <a:xfrm>
+            <a:off x="432000" y="360000"/>
+            <a:ext cx="8100000" cy="576000"/>
+          </a:xfrm>
+          <a:prstGeom prst="rect">
+            <a:avLst/>
+          </a:prstGeom>
+          <a:noFill/>
+        </p:spPr>
+        <p:txBody>
+          <a:bodyPr wrap="none">
+            <a:spAutoFit/>
+          </a:bodyPr>
+          <a:lstStyle/>
+          <a:p>
+            <a:r>
+              <a:rPr sz="2200" b="1"/>
+              <a:t>补充条款A：安全规范一票否决（红线条款）</a:t>
+            </a:r>
+          </a:p>
+        </p:txBody>
+      </p:sp>
+      <p:sp>
+        <p:nvSpPr>
+          <p:cNvPr id="3" name="TextBox 2"/>
+          <p:cNvSpPr txBox="1"/>
+          <p:nvPr/>
+        </p:nvSpPr>
+        <p:spPr>
+          <a:xfrm>
+            <a:off x="432000" y="1044000"/>
+            <a:ext cx="8100000" cy="5400000"/>
+          </a:xfrm>
+          <a:prstGeom prst="rect">
+            <a:avLst/>
+          </a:prstGeom>
+          <a:noFill/>
+        </p:spPr>
+        <p:txBody>
+          <a:bodyPr wrap="square">
+            <a:spAutoFit/>
+          </a:bodyPr>
+          <a:lstStyle/>
+          <a:p>
+            <a:pPr>
+              <a:spcAft>
+                <a:spcPts val="700"/>
+              </a:spcAft>
+            </a:pPr>
+            <a:r>
+              <a:rPr sz="1300"/>
+              <a:t>本条款与「五、学习评价」联动生效：下列任一红线一经查实，对应评价项直接计0，且综合成绩判为不及格，不因其他项高分而抵消。</a:t>
+            </a:r>
+          </a:p>
+          <a:p>
+            <a:pPr>
+              <a:spcAft>
+                <a:spcPts val="700"/>
+              </a:spcAft>
+            </a:pPr>
+            <a:r>
+              <a:rPr sz="1300"/>
+              <a:t>一票否决与学生工单「安全规范重申」五项打勾栏、教师签字栏逐条对应，任一环节缺签字即视为未完成安全准入。</a:t>
+            </a:r>
+          </a:p>
+        </p:txBody>
+      </p:sp>
+    </p:spTree>
+  </p:cSld>
+  <p:clrMapOvr>
+    <a:masterClrMapping/>
+  </p:clrMapOvr>
+</p:sld>
+</file>
+
+<file path=ppt/slides/slide29.xml><?xml version="1.0" encoding="utf-8"?>
+<p:sld xmlns:a="http://schemas.openxmlformats.org/drawingml/2006/main" xmlns:p="http://schemas.openxmlformats.org/presentationml/2006/main" xmlns:r="http://schemas.openxmlformats.org/officeDocument/2006/relationships">
+  <p:cSld>
+    <p:spTree>
+      <p:nvGrpSpPr>
+        <p:cNvPr id="1" name=""/>
+        <p:cNvGrpSpPr/>
+        <p:nvPr/>
+      </p:nvGrpSpPr>
+      <p:grpSpPr/>
+      <p:sp>
+        <p:nvSpPr>
+          <p:cNvPr id="2" name="TextBox 1"/>
+          <p:cNvSpPr txBox="1"/>
+          <p:nvPr/>
+        </p:nvSpPr>
+        <p:spPr>
+          <a:xfrm>
+            <a:off x="432000" y="360000"/>
+            <a:ext cx="8100000" cy="576000"/>
+          </a:xfrm>
+          <a:prstGeom prst="rect">
+            <a:avLst/>
+          </a:prstGeom>
+          <a:noFill/>
+        </p:spPr>
+        <p:txBody>
+          <a:bodyPr wrap="none">
+            <a:spAutoFit/>
+          </a:bodyPr>
+          <a:lstStyle/>
+          <a:p>
+            <a:r>
+              <a:rPr sz="2200" b="1"/>
+              <a:t>安全红线五条（与课标补充条款A同源·逐条对应工单打勾栏）</a:t>
+            </a:r>
+          </a:p>
+        </p:txBody>
+      </p:sp>
+      <p:sp>
+        <p:nvSpPr>
+          <p:cNvPr id="3" name="TextBox 2"/>
+          <p:cNvSpPr txBox="1"/>
+          <p:nvPr/>
+        </p:nvSpPr>
+        <p:spPr>
+          <a:xfrm>
+            <a:off x="432000" y="1044000"/>
+            <a:ext cx="8100000" cy="5400000"/>
+          </a:xfrm>
+          <a:prstGeom prst="rect">
+            <a:avLst/>
+          </a:prstGeom>
+          <a:noFill/>
+        </p:spPr>
+        <p:txBody>
+          <a:bodyPr wrap="square">
+            <a:spAutoFit/>
+          </a:bodyPr>
+          <a:lstStyle/>
+          <a:p>
+            <a:pPr>
+              <a:spcAft>
+                <a:spcPts val="700"/>
+              </a:spcAft>
+            </a:pPr>
+            <a:r>
+              <a:rPr sz="1200"/>
+              <a:t>红线一（安全准入缺失）：未完成任务工单「安全规范重申」五项逐条打勾并由本人签字的，不得通电上机操作；擅自操作者当次课过程性得分计0，该工单按未提交处理。</a:t>
+            </a:r>
+          </a:p>
+          <a:p>
+            <a:pPr>
+              <a:spcAft>
+                <a:spcPts val="700"/>
+              </a:spcAft>
+            </a:pPr>
+            <a:r>
+              <a:rPr sz="1200"/>
+              <a:t>红线二（带电违规作业）：未断电即插拔电源线、网线或设备端口，私自更换插排、超功率接入大功率用电器，或擅自合闸送电的，立即中止实训并移出工位，综合成绩判为不及格。</a:t>
+            </a:r>
+          </a:p>
+          <a:p>
+            <a:pPr>
+              <a:spcAft>
+                <a:spcPts val="700"/>
+              </a:spcAft>
+            </a:pPr>
+            <a:r>
+              <a:rPr sz="1200"/>
+              <a:t>红线三（异常未停止）：遇到冒烟、异味、异响、打火、外壳带电感或设备发热异常时，未立即停止操作、未断开本工位电源并报告指导教师而继续作业的，中止实训并计入安全违规台账。</a:t>
+            </a:r>
+          </a:p>
+          <a:p>
+            <a:pPr>
+              <a:spcAft>
+                <a:spcPts val="700"/>
+              </a:spcAft>
+            </a:pPr>
+            <a:r>
+              <a:rPr sz="1200"/>
+              <a:t>红线四（数据与诚信违规）：未经授权拷贝或外传企业真实数据、未脱敏样本，将涉密材料上传公网仓库，伪造运行截图、代打卡、伪造他人提交与组内贡献记录的，中止实训、该项计0并报送学院处理。</a:t>
+            </a:r>
+          </a:p>
+          <a:p>
+            <a:pPr>
+              <a:spcAft>
+                <a:spcPts val="700"/>
+              </a:spcAft>
+            </a:pPr>
+            <a:r>
+              <a:rPr sz="1200"/>
+              <a:t>红线五（6S与设备爱护缺失）：实训结束不执行整理、整顿、清扫、清洁、素养、安全六项，离场时未断电、未归位工具与耗材的，当次课6S项计0；累计3次触发者取消评优资格。</a:t>
             </a:r>
           </a:p>
         </p:txBody>
